--- a/Итоговый проект.pptx
+++ b/Итоговый проект.pptx
@@ -11161,7 +11161,7 @@
                 <a:cs typeface="Roboto"/>
                 <a:sym typeface="Roboto"/>
               </a:rPr>
-              <a:t>Это позволит сотрудникам в зависимости от филиала быстро получать доступ к важным для их работы файлам.</a:t>
+              <a:t>Это позволит сотрудникам быстро получать доступ к важным для их работы файлам.</a:t>
             </a:r>
           </a:p>
         </p:txBody>
@@ -11443,10 +11443,10 @@
       </p:sp>
       <p:pic>
         <p:nvPicPr>
-          <p:cNvPr id="3" name="Рисунок 2">
+          <p:cNvPr id="4" name="Рисунок 3">
             <a:extLst>
               <a:ext uri="{FF2B5EF4-FFF2-40B4-BE49-F238E27FC236}">
-                <a16:creationId xmlns:a16="http://schemas.microsoft.com/office/drawing/2014/main" id="{F01022F7-7A39-4572-B503-02726B118D3E}"/>
+                <a16:creationId xmlns:a16="http://schemas.microsoft.com/office/drawing/2014/main" id="{D507610B-D13D-47FB-8DF3-6133BDC0B373}"/>
               </a:ext>
             </a:extLst>
           </p:cNvPr>
@@ -11463,8 +11463,8 @@
         </p:blipFill>
         <p:spPr>
           <a:xfrm>
-            <a:off x="899886" y="1249329"/>
-            <a:ext cx="7024914" cy="3101425"/>
+            <a:off x="644051" y="1190172"/>
+            <a:ext cx="7817777" cy="3187831"/>
           </a:xfrm>
           <a:prstGeom prst="rect">
             <a:avLst/>
@@ -11894,7 +11894,7 @@
         <p:spPr>
           <a:xfrm>
             <a:off x="631371" y="1058967"/>
-            <a:ext cx="7750630" cy="3570208"/>
+            <a:ext cx="7750630" cy="3200876"/>
           </a:xfrm>
           <a:prstGeom prst="rect">
             <a:avLst/>
@@ -11908,79 +11908,79 @@
           <a:lstStyle/>
           <a:p>
             <a:r>
-              <a:rPr lang="ru-RU" b="1" dirty="0"/>
+              <a:rPr lang="ru-RU" sz="1100" b="1" dirty="0"/>
               <a:t>Выводы</a:t>
             </a:r>
-            <a:endParaRPr lang="ru-RU" sz="1100" b="1" dirty="0"/>
+            <a:endParaRPr lang="ru-RU" sz="1000" b="1" dirty="0"/>
           </a:p>
           <a:p>
-            <a:endParaRPr lang="ru-RU" sz="1100" dirty="0"/>
+            <a:endParaRPr lang="ru-RU" sz="1000" dirty="0"/>
           </a:p>
           <a:p>
             <a:r>
-              <a:rPr lang="ru-RU" sz="1100" dirty="0"/>
-              <a:t>Проект мессенджера, на мой взгляд, получился масштабируемым, готовым к ожидаемым нагрузкам. </a:t>
+              <a:rPr lang="ru-RU" sz="1000" dirty="0"/>
+              <a:t>Проект мессенджера, на мой взгляд, получается масштабируемым, готовым к ожидаемым нагрузкам. </a:t>
             </a:r>
           </a:p>
           <a:p>
-            <a:endParaRPr lang="ru-RU" sz="1100" dirty="0"/>
+            <a:endParaRPr lang="ru-RU" sz="1000" dirty="0"/>
           </a:p>
           <a:p>
             <a:r>
-              <a:rPr lang="ru-RU" sz="1100" dirty="0"/>
-              <a:t>Узкими местами представляется Сервис получения данных о документах, но это не является критическим узлом, т.к. не нарушает всей работы мессенджера и системы и отсутствие взаимодействия некоторое время несильно скажется на работе сотрудников. </a:t>
+              <a:rPr lang="ru-RU" sz="1000" dirty="0"/>
+              <a:t>Узкими местами представляются Сервис получения данных о документах внешней системы, но это не является критическим узлом, т.к. не нарушает всей работы мессенджера и системы и отсутствие взаимодействия некоторое время несильно скажется на работе сотрудников. </a:t>
             </a:r>
           </a:p>
           <a:p>
-            <a:endParaRPr lang="ru-RU" sz="1100" dirty="0"/>
+            <a:endParaRPr lang="ru-RU" sz="1000" dirty="0"/>
           </a:p>
           <a:p>
             <a:r>
-              <a:rPr lang="ru-RU" sz="1100" dirty="0"/>
-              <a:t>Так же можно выделить сервис уведомлений. Он тоже не является критическим узлом и позволяет вести основную деятельность, но уже с пониженным комфортом. Этот сервис можно дополнить сервисом, работающим со сторонними мессенджерами (например Телеграм), почтой и т.п.</a:t>
+              <a:rPr lang="ru-RU" sz="1000" dirty="0"/>
+              <a:t>Так же можно выделить Сервис уведомлений. Он тоже не является критическим узлом и позволяет вести основную деятельность, но уже с пониженным комфортом. Функционал этого сервиса можно дополнить сервисом, работающим со сторонними мессенджерами (например Телеграм), почтой и т.п.</a:t>
             </a:r>
           </a:p>
           <a:p>
-            <a:endParaRPr lang="ru-RU" sz="1100" dirty="0"/>
+            <a:endParaRPr lang="ru-RU" sz="1000" dirty="0"/>
           </a:p>
           <a:p>
             <a:r>
-              <a:rPr lang="ru-RU" sz="1100" dirty="0"/>
-              <a:t>Одним из критических узлов представляется Сервис управления пользователями, т.к. отвечает за авторизацию и получению дополнительной информации из </a:t>
-            </a:r>
-            <a:r>
-              <a:rPr lang="en-US" sz="1100" dirty="0"/>
-              <a:t>AD</a:t>
-            </a:r>
-            <a:r>
-              <a:rPr lang="ru-RU" sz="1100" dirty="0"/>
-              <a:t>. Его можно масштабировать горизонтально вместе с отдельной таблицей авторизации пользователей.</a:t>
+              <a:rPr lang="ru-RU" sz="1000" dirty="0"/>
+              <a:t>Критическим местом выступает Сервис управления пользователями, т.к. отвечает за авторизацию в мессенджере. Его можно продублировать отдельно стоящим резервным инстансом. В целом, в обеспечении отказоустойчивости помогает мониторинг, информирующий администратора о функционировании системы.</a:t>
             </a:r>
           </a:p>
           <a:p>
-            <a:endParaRPr lang="ru-RU" sz="1100" dirty="0"/>
+            <a:endParaRPr lang="ru-RU" sz="1000" dirty="0"/>
           </a:p>
           <a:p>
             <a:r>
-              <a:rPr lang="ru-RU" b="1" dirty="0"/>
+              <a:rPr lang="ru-RU" sz="1100" b="1" dirty="0"/>
               <a:t>Планы</a:t>
             </a:r>
-            <a:endParaRPr lang="ru-RU" sz="1100" b="1" dirty="0"/>
+            <a:endParaRPr lang="ru-RU" sz="1000" b="1" dirty="0"/>
           </a:p>
           <a:p>
-            <a:endParaRPr lang="ru-RU" sz="1100" dirty="0"/>
+            <a:endParaRPr lang="ru-RU" sz="1000" dirty="0"/>
           </a:p>
           <a:p>
             <a:r>
-              <a:rPr lang="ru-RU" sz="1100" dirty="0"/>
-              <a:t>Помимо расширения компетенций и опыта в высокой нагрузке, в таких сопутствующих областях, как мобильная разработка и фронт, хочется попробовать </a:t>
+              <a:rPr lang="ru-RU" sz="1000" dirty="0"/>
+              <a:t>Помимо расширения компетенций, получения опыта в высокой нагрузке</a:t>
             </a:r>
             <a:r>
-              <a:rPr lang="ru-RU" sz="1100" dirty="0" err="1"/>
-              <a:t>тимлидинг</a:t>
+              <a:rPr lang="en-US" sz="1000" dirty="0"/>
+              <a:t> </a:t>
             </a:r>
             <a:r>
-              <a:rPr lang="ru-RU" sz="1100" dirty="0"/>
+              <a:rPr lang="ru-RU" sz="1000" dirty="0"/>
+              <a:t>и в таких сопутствующих областях, как мобильная разработка и фронт, хочется попробовать </a:t>
+            </a:r>
+            <a:r>
+              <a:rPr lang="ru-RU" sz="1000" dirty="0" err="1"/>
+              <a:t>тимлидство</a:t>
+            </a:r>
+            <a:r>
+              <a:rPr lang="ru-RU" sz="1000" dirty="0"/>
               <a:t>. Возможно, понравится.</a:t>
             </a:r>
           </a:p>

--- a/Итоговый проект.pptx
+++ b/Итоговый проект.pptx
@@ -13885,7 +13885,7 @@
           <p:nvPr>
             <p:extLst>
               <p:ext uri="{D42A27DB-BD31-4B8C-83A1-F6EECF244321}">
-                <p14:modId xmlns:p14="http://schemas.microsoft.com/office/powerpoint/2010/main" val="1719404872"/>
+                <p14:modId xmlns:p14="http://schemas.microsoft.com/office/powerpoint/2010/main" val="1360382696"/>
               </p:ext>
             </p:extLst>
           </p:nvPr>
@@ -14233,7 +14233,7 @@
                           <a:cs typeface="Roboto"/>
                           <a:sym typeface="Roboto"/>
                         </a:rPr>
-                        <a:t> – контейнеризация, открывающая удобство дистрибуции.</a:t>
+                        <a:t> – технология, открывшая преимущества и удобство контейнеризации.</a:t>
                       </a:r>
                       <a:endParaRPr lang="en-US" sz="1300" dirty="0">
                         <a:latin typeface="Roboto"/>
@@ -14397,7 +14397,7 @@
                           <a:cs typeface="Roboto"/>
                           <a:sym typeface="Roboto"/>
                         </a:rPr>
-                        <a:t>Redis, Elasticsearch</a:t>
+                        <a:t>Redis</a:t>
                       </a:r>
                       <a:r>
                         <a:rPr lang="ru-RU" sz="1300" dirty="0">
@@ -14406,7 +14406,25 @@
                           <a:cs typeface="Roboto"/>
                           <a:sym typeface="Roboto"/>
                         </a:rPr>
-                        <a:t> – новое и сложное. И очень интересное.</a:t>
+                        <a:t> и </a:t>
+                      </a:r>
+                      <a:r>
+                        <a:rPr lang="en-US" sz="1300" dirty="0">
+                          <a:latin typeface="Roboto"/>
+                          <a:ea typeface="Roboto"/>
+                          <a:cs typeface="Roboto"/>
+                          <a:sym typeface="Roboto"/>
+                        </a:rPr>
+                        <a:t>Elasticsearch</a:t>
+                      </a:r>
+                      <a:r>
+                        <a:rPr lang="ru-RU" sz="1300" dirty="0">
+                          <a:latin typeface="Roboto"/>
+                          <a:ea typeface="Roboto"/>
+                          <a:cs typeface="Roboto"/>
+                          <a:sym typeface="Roboto"/>
+                        </a:rPr>
+                        <a:t> – новое и сложное, очень интересное.</a:t>
                       </a:r>
                       <a:endParaRPr sz="1300" dirty="0">
                         <a:latin typeface="Roboto"/>

--- a/Итоговый проект.pptx
+++ b/Итоговый проект.pptx
@@ -11660,7 +11660,7 @@
         <p:spPr>
           <a:xfrm>
             <a:off x="616856" y="1240396"/>
-            <a:ext cx="5275943" cy="2677656"/>
+            <a:ext cx="5275943" cy="2893100"/>
           </a:xfrm>
           <a:prstGeom prst="rect">
             <a:avLst/>
@@ -11709,13 +11709,8 @@
           <a:p>
             <a:r>
               <a:rPr lang="ru-RU" b="1" dirty="0"/>
-              <a:t>БД- </a:t>
+              <a:t>БД</a:t>
             </a:r>
-            <a:r>
-              <a:rPr lang="ru-RU" b="1" dirty="0" err="1"/>
-              <a:t>Реплицирование</a:t>
-            </a:r>
-            <a:endParaRPr lang="ru-RU" b="1" dirty="0"/>
           </a:p>
           <a:p>
             <a:pPr marL="285750" indent="-285750">
@@ -11729,6 +11724,20 @@
             <a:r>
               <a:rPr lang="ru-RU" dirty="0"/>
               <a:t> по филиалам;</a:t>
+            </a:r>
+          </a:p>
+          <a:p>
+            <a:pPr marL="285750" indent="-285750">
+              <a:buFontTx/>
+              <a:buChar char="-"/>
+            </a:pPr>
+            <a:r>
+              <a:rPr lang="ru-RU" dirty="0" err="1"/>
+              <a:t>Реплицирование</a:t>
+            </a:r>
+            <a:r>
+              <a:rPr lang="ru-RU" dirty="0"/>
+              <a:t>.</a:t>
             </a:r>
           </a:p>
           <a:p>
@@ -11746,9 +11755,10 @@
               <a:buChar char="-"/>
             </a:pPr>
             <a:r>
-              <a:rPr lang="ru-RU" dirty="0"/>
-              <a:t>CDN</a:t>
+              <a:rPr lang="ru-RU"/>
+              <a:t>CDN.</a:t>
             </a:r>
+            <a:endParaRPr lang="ru-RU" dirty="0"/>
           </a:p>
           <a:p>
             <a:endParaRPr lang="ru-RU" b="1" dirty="0"/>
